--- a/coursework files/Мамедов Орудж 680.23.pptx
+++ b/coursework files/Мамедов Орудж 680.23.pptx
@@ -10,16 +10,18 @@
     <p:sldId id="258" r:id="rId4"/>
     <p:sldId id="259" r:id="rId5"/>
     <p:sldId id="260" r:id="rId6"/>
-    <p:sldId id="261" r:id="rId7"/>
-    <p:sldId id="268" r:id="rId8"/>
-    <p:sldId id="262" r:id="rId9"/>
-    <p:sldId id="263" r:id="rId10"/>
-    <p:sldId id="264" r:id="rId11"/>
-    <p:sldId id="265" r:id="rId12"/>
-    <p:sldId id="269" r:id="rId13"/>
-    <p:sldId id="266" r:id="rId14"/>
-    <p:sldId id="267" r:id="rId15"/>
-    <p:sldId id="270" r:id="rId16"/>
+    <p:sldId id="272" r:id="rId7"/>
+    <p:sldId id="261" r:id="rId8"/>
+    <p:sldId id="268" r:id="rId9"/>
+    <p:sldId id="262" r:id="rId10"/>
+    <p:sldId id="263" r:id="rId11"/>
+    <p:sldId id="264" r:id="rId12"/>
+    <p:sldId id="265" r:id="rId13"/>
+    <p:sldId id="269" r:id="rId14"/>
+    <p:sldId id="271" r:id="rId15"/>
+    <p:sldId id="266" r:id="rId16"/>
+    <p:sldId id="267" r:id="rId17"/>
+    <p:sldId id="270" r:id="rId18"/>
   </p:sldIdLst>
   <p:sldSz cx="12192000" cy="6858000"/>
   <p:notesSz cx="6858000" cy="9144000"/>
@@ -849,7 +851,7 @@
             <a:fld id="{B61BEF0D-F0BB-DE4B-95CE-6DB70DBA9567}" type="datetimeFigureOut">
               <a:rPr lang="en-US" dirty="0"/>
               <a:pPr/>
-              <a:t>5/13/2026</a:t>
+              <a:t>5/14/2026</a:t>
             </a:fld>
             <a:endParaRPr lang="en-US" dirty="0"/>
           </a:p>
@@ -1097,7 +1099,7 @@
             <a:fld id="{B61BEF0D-F0BB-DE4B-95CE-6DB70DBA9567}" type="datetimeFigureOut">
               <a:rPr lang="en-US" dirty="0"/>
               <a:pPr/>
-              <a:t>5/13/2026</a:t>
+              <a:t>5/14/2026</a:t>
             </a:fld>
             <a:endParaRPr lang="en-US" dirty="0"/>
           </a:p>
@@ -1408,7 +1410,7 @@
             <a:fld id="{B61BEF0D-F0BB-DE4B-95CE-6DB70DBA9567}" type="datetimeFigureOut">
               <a:rPr lang="en-US" dirty="0"/>
               <a:pPr/>
-              <a:t>5/13/2026</a:t>
+              <a:t>5/14/2026</a:t>
             </a:fld>
             <a:endParaRPr lang="en-US" dirty="0"/>
           </a:p>
@@ -1746,7 +1748,7 @@
             <a:fld id="{B61BEF0D-F0BB-DE4B-95CE-6DB70DBA9567}" type="datetimeFigureOut">
               <a:rPr lang="en-US" dirty="0"/>
               <a:pPr/>
-              <a:t>5/13/2026</a:t>
+              <a:t>5/14/2026</a:t>
             </a:fld>
             <a:endParaRPr lang="en-US" dirty="0"/>
           </a:p>
@@ -2057,7 +2059,7 @@
             <a:fld id="{B61BEF0D-F0BB-DE4B-95CE-6DB70DBA9567}" type="datetimeFigureOut">
               <a:rPr lang="en-US" dirty="0"/>
               <a:pPr/>
-              <a:t>5/13/2026</a:t>
+              <a:t>5/14/2026</a:t>
             </a:fld>
             <a:endParaRPr lang="en-US" dirty="0"/>
           </a:p>
@@ -2447,7 +2449,7 @@
             <a:fld id="{B61BEF0D-F0BB-DE4B-95CE-6DB70DBA9567}" type="datetimeFigureOut">
               <a:rPr lang="en-US" dirty="0"/>
               <a:pPr/>
-              <a:t>5/13/2026</a:t>
+              <a:t>5/14/2026</a:t>
             </a:fld>
             <a:endParaRPr lang="en-US" dirty="0"/>
           </a:p>
@@ -2613,7 +2615,7 @@
           <a:p>
             <a:fld id="{55C6B4A9-1611-4792-9094-5F34BCA07E0B}" type="datetimeFigureOut">
               <a:rPr lang="en-US" dirty="0"/>
-              <a:t>5/13/2026</a:t>
+              <a:t>5/14/2026</a:t>
             </a:fld>
             <a:endParaRPr lang="en-US" dirty="0"/>
           </a:p>
@@ -2789,7 +2791,7 @@
             <a:fld id="{B61BEF0D-F0BB-DE4B-95CE-6DB70DBA9567}" type="datetimeFigureOut">
               <a:rPr lang="en-US" dirty="0"/>
               <a:pPr/>
-              <a:t>5/13/2026</a:t>
+              <a:t>5/14/2026</a:t>
             </a:fld>
             <a:endParaRPr lang="en-US" dirty="0"/>
           </a:p>
@@ -2962,7 +2964,7 @@
             <a:fld id="{B61BEF0D-F0BB-DE4B-95CE-6DB70DBA9567}" type="datetimeFigureOut">
               <a:rPr lang="en-US" dirty="0"/>
               <a:pPr/>
-              <a:t>5/13/2026</a:t>
+              <a:t>5/14/2026</a:t>
             </a:fld>
             <a:endParaRPr lang="en-US" dirty="0"/>
           </a:p>
@@ -3206,7 +3208,7 @@
             <a:fld id="{B61BEF0D-F0BB-DE4B-95CE-6DB70DBA9567}" type="datetimeFigureOut">
               <a:rPr lang="en-US" dirty="0"/>
               <a:pPr/>
-              <a:t>5/13/2026</a:t>
+              <a:t>5/14/2026</a:t>
             </a:fld>
             <a:endParaRPr lang="en-US" dirty="0"/>
           </a:p>
@@ -3434,7 +3436,7 @@
           <a:p>
             <a:fld id="{EB712588-04B1-427B-82EE-E8DB90309F08}" type="datetimeFigureOut">
               <a:rPr lang="en-US" dirty="0"/>
-              <a:t>5/13/2026</a:t>
+              <a:t>5/14/2026</a:t>
             </a:fld>
             <a:endParaRPr lang="en-US" dirty="0"/>
           </a:p>
@@ -3804,7 +3806,7 @@
             <a:fld id="{B61BEF0D-F0BB-DE4B-95CE-6DB70DBA9567}" type="datetimeFigureOut">
               <a:rPr lang="en-US" dirty="0"/>
               <a:pPr/>
-              <a:t>5/13/2026</a:t>
+              <a:t>5/14/2026</a:t>
             </a:fld>
             <a:endParaRPr lang="en-US" dirty="0"/>
           </a:p>
@@ -3924,7 +3926,7 @@
             <a:fld id="{B61BEF0D-F0BB-DE4B-95CE-6DB70DBA9567}" type="datetimeFigureOut">
               <a:rPr lang="en-US" dirty="0"/>
               <a:pPr/>
-              <a:t>5/13/2026</a:t>
+              <a:t>5/14/2026</a:t>
             </a:fld>
             <a:endParaRPr lang="en-US" dirty="0"/>
           </a:p>
@@ -4016,7 +4018,7 @@
             <a:fld id="{B61BEF0D-F0BB-DE4B-95CE-6DB70DBA9567}" type="datetimeFigureOut">
               <a:rPr lang="en-US" dirty="0"/>
               <a:pPr/>
-              <a:t>5/13/2026</a:t>
+              <a:t>5/14/2026</a:t>
             </a:fld>
             <a:endParaRPr lang="en-US" dirty="0"/>
           </a:p>
@@ -4267,7 +4269,7 @@
           <a:p>
             <a:fld id="{42A54C80-263E-416B-A8E0-580EDEADCBDC}" type="datetimeFigureOut">
               <a:rPr lang="en-US" dirty="0"/>
-              <a:t>5/13/2026</a:t>
+              <a:t>5/14/2026</a:t>
             </a:fld>
             <a:endParaRPr lang="en-US" dirty="0"/>
           </a:p>
@@ -4526,7 +4528,7 @@
             <a:fld id="{B61BEF0D-F0BB-DE4B-95CE-6DB70DBA9567}" type="datetimeFigureOut">
               <a:rPr lang="en-US" dirty="0"/>
               <a:pPr/>
-              <a:t>5/13/2026</a:t>
+              <a:t>5/14/2026</a:t>
             </a:fld>
             <a:endParaRPr lang="en-US" dirty="0"/>
           </a:p>
@@ -5266,7 +5268,7 @@
             <a:fld id="{B61BEF0D-F0BB-DE4B-95CE-6DB70DBA9567}" type="datetimeFigureOut">
               <a:rPr lang="en-US" dirty="0"/>
               <a:pPr/>
-              <a:t>5/13/2026</a:t>
+              <a:t>5/14/2026</a:t>
             </a:fld>
             <a:endParaRPr lang="en-US" dirty="0"/>
           </a:p>
@@ -5900,7 +5902,7 @@
           <p:cNvPr id="2" name="Заголовок 1">
             <a:extLst>
               <a:ext uri="{FF2B5EF4-FFF2-40B4-BE49-F238E27FC236}">
-                <a16:creationId xmlns:a16="http://schemas.microsoft.com/office/drawing/2014/main" id="{5116BE68-351C-3C2A-7BC6-7AC8F2D72743}"/>
+                <a16:creationId xmlns:a16="http://schemas.microsoft.com/office/drawing/2014/main" id="{35D28735-BA83-B195-15F7-63FF314EB393}"/>
               </a:ext>
             </a:extLst>
           </p:cNvPr>
@@ -5918,7 +5920,7 @@
           <a:p>
             <a:r>
               <a:rPr lang="ru-RU" dirty="0"/>
-              <a:t>Реализация поиска</a:t>
+              <a:t>Карточки товаров</a:t>
             </a:r>
           </a:p>
         </p:txBody>
@@ -5928,7 +5930,7 @@
           <p:cNvPr id="6" name="Рисунок 5">
             <a:extLst>
               <a:ext uri="{FF2B5EF4-FFF2-40B4-BE49-F238E27FC236}">
-                <a16:creationId xmlns:a16="http://schemas.microsoft.com/office/drawing/2014/main" id="{C095DF6E-A99F-3EE4-C57A-C5DDC652D4AA}"/>
+                <a16:creationId xmlns:a16="http://schemas.microsoft.com/office/drawing/2014/main" id="{C9FA32EB-1D5E-2B7B-7C3C-2F97D0EE0988}"/>
               </a:ext>
             </a:extLst>
           </p:cNvPr>
@@ -5941,10 +5943,16 @@
         </p:nvPicPr>
         <p:blipFill>
           <a:blip r:embed="rId2"/>
-          <a:srcRect t="4658" b="4658"/>
-          <a:stretch/>
+          <a:srcRect l="-567" r="7"/>
+          <a:stretch>
+            <a:fillRect/>
+          </a:stretch>
         </p:blipFill>
         <p:spPr>
+          <a:xfrm>
+            <a:off x="677334" y="1487303"/>
+            <a:ext cx="8596667" cy="3103455"/>
+          </a:xfrm>
           <a:prstGeom prst="rect">
             <a:avLst/>
           </a:prstGeom>
@@ -5955,7 +5963,7 @@
           <p:cNvPr id="4" name="Текст 3">
             <a:extLst>
               <a:ext uri="{FF2B5EF4-FFF2-40B4-BE49-F238E27FC236}">
-                <a16:creationId xmlns:a16="http://schemas.microsoft.com/office/drawing/2014/main" id="{3F0D4142-DBBF-0BAA-022A-E30AE2875CE5}"/>
+                <a16:creationId xmlns:a16="http://schemas.microsoft.com/office/drawing/2014/main" id="{1CE68BCA-23DE-7DC4-44FA-48CF5E210441}"/>
               </a:ext>
             </a:extLst>
           </p:cNvPr>
@@ -5973,7 +5981,7 @@
           <a:p>
             <a:r>
               <a:rPr lang="ru-RU" dirty="0"/>
-              <a:t>Система поиска позволяет находить товары по названию или категории. Поиск обновляет результаты в реальном времени без перезагрузки страницы.</a:t>
+              <a:t>Карточки товаров содержат основную информацию о продукте, включая изображение, название и стоимость. Также в карточках реализована кнопка добавления товара в корзину.</a:t>
             </a:r>
           </a:p>
         </p:txBody>
@@ -5981,7 +5989,7 @@
     </p:spTree>
     <p:extLst>
       <p:ext uri="{BB962C8B-B14F-4D97-AF65-F5344CB8AC3E}">
-        <p14:creationId xmlns:p14="http://schemas.microsoft.com/office/powerpoint/2010/main" val="1008350610"/>
+        <p14:creationId xmlns:p14="http://schemas.microsoft.com/office/powerpoint/2010/main" val="1714431669"/>
       </p:ext>
     </p:extLst>
   </p:cSld>
@@ -6013,7 +6021,7 @@
           <p:cNvPr id="2" name="Заголовок 1">
             <a:extLst>
               <a:ext uri="{FF2B5EF4-FFF2-40B4-BE49-F238E27FC236}">
-                <a16:creationId xmlns:a16="http://schemas.microsoft.com/office/drawing/2014/main" id="{9EB1EC2F-840B-4EBE-664A-2E9ACFAA1FC5}"/>
+                <a16:creationId xmlns:a16="http://schemas.microsoft.com/office/drawing/2014/main" id="{5116BE68-351C-3C2A-7BC6-7AC8F2D72743}"/>
               </a:ext>
             </a:extLst>
           </p:cNvPr>
@@ -6031,7 +6039,7 @@
           <a:p>
             <a:r>
               <a:rPr lang="ru-RU" dirty="0"/>
-              <a:t>Корзина</a:t>
+              <a:t>Реализация поиска</a:t>
             </a:r>
           </a:p>
         </p:txBody>
@@ -6041,7 +6049,7 @@
           <p:cNvPr id="6" name="Рисунок 5">
             <a:extLst>
               <a:ext uri="{FF2B5EF4-FFF2-40B4-BE49-F238E27FC236}">
-                <a16:creationId xmlns:a16="http://schemas.microsoft.com/office/drawing/2014/main" id="{C218BEA5-7889-A60E-3483-B95F438A8065}"/>
+                <a16:creationId xmlns:a16="http://schemas.microsoft.com/office/drawing/2014/main" id="{C095DF6E-A99F-3EE4-C57A-C5DDC652D4AA}"/>
               </a:ext>
             </a:extLst>
           </p:cNvPr>
@@ -6054,16 +6062,10 @@
         </p:nvPicPr>
         <p:blipFill>
           <a:blip r:embed="rId2"/>
-          <a:srcRect t="3264" b="1537"/>
-          <a:stretch>
-            <a:fillRect/>
-          </a:stretch>
+          <a:srcRect t="4658" b="4658"/>
+          <a:stretch/>
         </p:blipFill>
         <p:spPr>
-          <a:xfrm>
-            <a:off x="677334" y="331983"/>
-            <a:ext cx="6394798" cy="4468617"/>
-          </a:xfrm>
           <a:prstGeom prst="rect">
             <a:avLst/>
           </a:prstGeom>
@@ -6074,7 +6076,7 @@
           <p:cNvPr id="4" name="Текст 3">
             <a:extLst>
               <a:ext uri="{FF2B5EF4-FFF2-40B4-BE49-F238E27FC236}">
-                <a16:creationId xmlns:a16="http://schemas.microsoft.com/office/drawing/2014/main" id="{2CFE5121-BA71-C67D-EFD8-C157364EA4AC}"/>
+                <a16:creationId xmlns:a16="http://schemas.microsoft.com/office/drawing/2014/main" id="{3F0D4142-DBBF-0BAA-022A-E30AE2875CE5}"/>
               </a:ext>
             </a:extLst>
           </p:cNvPr>
@@ -6092,7 +6094,7 @@
           <a:p>
             <a:r>
               <a:rPr lang="ru-RU" dirty="0"/>
-              <a:t>Корзина используется для хранения выбранных пользователем товаров. В ней реализована возможность изменения количества товаров и подсчёта общей стоимости заказа.</a:t>
+              <a:t>Система поиска позволяет находить товары по названию или категории. Поиск обновляет результаты в реальном времени без перезагрузки страницы.</a:t>
             </a:r>
           </a:p>
         </p:txBody>
@@ -6100,7 +6102,7 @@
     </p:spTree>
     <p:extLst>
       <p:ext uri="{BB962C8B-B14F-4D97-AF65-F5344CB8AC3E}">
-        <p14:creationId xmlns:p14="http://schemas.microsoft.com/office/powerpoint/2010/main" val="773686608"/>
+        <p14:creationId xmlns:p14="http://schemas.microsoft.com/office/powerpoint/2010/main" val="1008350610"/>
       </p:ext>
     </p:extLst>
   </p:cSld>
@@ -6132,7 +6134,7 @@
           <p:cNvPr id="2" name="Заголовок 1">
             <a:extLst>
               <a:ext uri="{FF2B5EF4-FFF2-40B4-BE49-F238E27FC236}">
-                <a16:creationId xmlns:a16="http://schemas.microsoft.com/office/drawing/2014/main" id="{CDF56A01-7F26-F9CC-EEB9-BF3C5AB2D46C}"/>
+                <a16:creationId xmlns:a16="http://schemas.microsoft.com/office/drawing/2014/main" id="{9EB1EC2F-840B-4EBE-664A-2E9ACFAA1FC5}"/>
               </a:ext>
             </a:extLst>
           </p:cNvPr>
@@ -6143,21 +6145,15 @@
             <p:ph type="title"/>
           </p:nvPr>
         </p:nvSpPr>
-        <p:spPr>
-          <a:xfrm>
-            <a:off x="677334" y="4114800"/>
-            <a:ext cx="8596667" cy="566738"/>
-          </a:xfrm>
-        </p:spPr>
+        <p:spPr/>
         <p:txBody>
           <a:bodyPr/>
           <a:lstStyle/>
           <a:p>
             <a:r>
-              <a:rPr lang="en-US" dirty="0"/>
-              <a:t>products.js</a:t>
-            </a:r>
-            <a:endParaRPr lang="ru-RU" dirty="0"/>
+              <a:rPr lang="ru-RU" dirty="0"/>
+              <a:t>Корзина</a:t>
+            </a:r>
           </a:p>
         </p:txBody>
       </p:sp>
@@ -6166,7 +6162,7 @@
           <p:cNvPr id="6" name="Рисунок 5">
             <a:extLst>
               <a:ext uri="{FF2B5EF4-FFF2-40B4-BE49-F238E27FC236}">
-                <a16:creationId xmlns:a16="http://schemas.microsoft.com/office/drawing/2014/main" id="{E160F5D4-DA9C-EAE9-2C5D-82E12E7FD180}"/>
+                <a16:creationId xmlns:a16="http://schemas.microsoft.com/office/drawing/2014/main" id="{C218BEA5-7889-A60E-3483-B95F438A8065}"/>
               </a:ext>
             </a:extLst>
           </p:cNvPr>
@@ -6179,13 +6175,15 @@
         </p:nvPicPr>
         <p:blipFill>
           <a:blip r:embed="rId2"/>
-          <a:srcRect t="8715" b="8715"/>
-          <a:stretch/>
+          <a:srcRect t="3264" b="1537"/>
+          <a:stretch>
+            <a:fillRect/>
+          </a:stretch>
         </p:blipFill>
         <p:spPr>
           <a:xfrm>
-            <a:off x="312102" y="310348"/>
-            <a:ext cx="10148325" cy="3804451"/>
+            <a:off x="677334" y="331983"/>
+            <a:ext cx="6394798" cy="4468617"/>
           </a:xfrm>
           <a:prstGeom prst="rect">
             <a:avLst/>
@@ -6197,7 +6195,7 @@
           <p:cNvPr id="4" name="Текст 3">
             <a:extLst>
               <a:ext uri="{FF2B5EF4-FFF2-40B4-BE49-F238E27FC236}">
-                <a16:creationId xmlns:a16="http://schemas.microsoft.com/office/drawing/2014/main" id="{0F4B6125-AED5-176B-E08C-5D747A80A55C}"/>
+                <a16:creationId xmlns:a16="http://schemas.microsoft.com/office/drawing/2014/main" id="{2CFE5121-BA71-C67D-EFD8-C157364EA4AC}"/>
               </a:ext>
             </a:extLst>
           </p:cNvPr>
@@ -6208,54 +6206,22 @@
             <p:ph type="body" sz="half" idx="2"/>
           </p:nvPr>
         </p:nvSpPr>
-        <p:spPr>
-          <a:xfrm>
-            <a:off x="677334" y="4703611"/>
-            <a:ext cx="8771466" cy="2154389"/>
-          </a:xfrm>
-        </p:spPr>
-        <p:txBody>
-          <a:bodyPr>
-            <a:noAutofit/>
-          </a:bodyPr>
-          <a:lstStyle/>
-          <a:p>
-            <a:pPr algn="just"/>
-            <a:r>
-              <a:rPr lang="ru-RU" sz="1600" dirty="0"/>
-              <a:t>Файл products.js использовался для хранения информации о товарах веб-сайта. В данном файле были реализованы массивы объектов, содержащие название товара, категорию, стоимость и изображение, что позволило динамически выводить карточки товаров на страницах сайта. В крупных веб-проектах данные о товарах обычно хранятся в базе данных и передаются на сайт через </a:t>
-            </a:r>
-            <a:r>
-              <a:rPr lang="ru-RU" sz="1600" dirty="0" err="1"/>
-              <a:t>backend</a:t>
-            </a:r>
-            <a:r>
-              <a:rPr lang="ru-RU" sz="1600" dirty="0"/>
-              <a:t> и API. В данном проекте использовался упрощённый вариант реализации, при котором информация о товарах была сохранена в отдельном JavaScript файле и динамически выводилась на страницы веб-сайта.</a:t>
-            </a:r>
-          </a:p>
-          <a:p>
-            <a:pPr algn="just"/>
-            <a:endParaRPr lang="ru-RU" sz="1600" dirty="0"/>
-          </a:p>
-          <a:p>
-            <a:pPr algn="just"/>
-            <a:endParaRPr lang="ru-RU" sz="1600" dirty="0"/>
-          </a:p>
-          <a:p>
-            <a:pPr algn="just"/>
-            <a:endParaRPr lang="ru-RU" sz="1600" dirty="0"/>
-          </a:p>
-          <a:p>
-            <a:pPr algn="just"/>
-            <a:endParaRPr lang="ru-RU" sz="1600" dirty="0"/>
+        <p:spPr/>
+        <p:txBody>
+          <a:bodyPr/>
+          <a:lstStyle/>
+          <a:p>
+            <a:r>
+              <a:rPr lang="ru-RU" dirty="0"/>
+              <a:t>Корзина используется для хранения выбранных пользователем товаров. В ней реализована возможность изменения количества товаров и подсчёта общей стоимости заказа.</a:t>
+            </a:r>
           </a:p>
         </p:txBody>
       </p:sp>
     </p:spTree>
     <p:extLst>
       <p:ext uri="{BB962C8B-B14F-4D97-AF65-F5344CB8AC3E}">
-        <p14:creationId xmlns:p14="http://schemas.microsoft.com/office/powerpoint/2010/main" val="3243194610"/>
+        <p14:creationId xmlns:p14="http://schemas.microsoft.com/office/powerpoint/2010/main" val="773686608"/>
       </p:ext>
     </p:extLst>
   </p:cSld>
@@ -6287,6 +6253,341 @@
           <p:cNvPr id="2" name="Заголовок 1">
             <a:extLst>
               <a:ext uri="{FF2B5EF4-FFF2-40B4-BE49-F238E27FC236}">
+                <a16:creationId xmlns:a16="http://schemas.microsoft.com/office/drawing/2014/main" id="{CDF56A01-7F26-F9CC-EEB9-BF3C5AB2D46C}"/>
+              </a:ext>
+            </a:extLst>
+          </p:cNvPr>
+          <p:cNvSpPr>
+            <a:spLocks noGrp="1"/>
+          </p:cNvSpPr>
+          <p:nvPr>
+            <p:ph type="title"/>
+          </p:nvPr>
+        </p:nvSpPr>
+        <p:spPr>
+          <a:xfrm>
+            <a:off x="677334" y="4114800"/>
+            <a:ext cx="8596667" cy="566738"/>
+          </a:xfrm>
+        </p:spPr>
+        <p:txBody>
+          <a:bodyPr/>
+          <a:lstStyle/>
+          <a:p>
+            <a:r>
+              <a:rPr lang="en-US" dirty="0"/>
+              <a:t>products.js</a:t>
+            </a:r>
+            <a:endParaRPr lang="ru-RU" dirty="0"/>
+          </a:p>
+        </p:txBody>
+      </p:sp>
+      <p:pic>
+        <p:nvPicPr>
+          <p:cNvPr id="6" name="Рисунок 5">
+            <a:extLst>
+              <a:ext uri="{FF2B5EF4-FFF2-40B4-BE49-F238E27FC236}">
+                <a16:creationId xmlns:a16="http://schemas.microsoft.com/office/drawing/2014/main" id="{E160F5D4-DA9C-EAE9-2C5D-82E12E7FD180}"/>
+              </a:ext>
+            </a:extLst>
+          </p:cNvPr>
+          <p:cNvPicPr>
+            <a:picLocks noGrp="1" noChangeAspect="1"/>
+          </p:cNvPicPr>
+          <p:nvPr>
+            <p:ph type="pic" idx="1"/>
+          </p:nvPr>
+        </p:nvPicPr>
+        <p:blipFill>
+          <a:blip r:embed="rId2"/>
+          <a:srcRect t="8715" b="8715"/>
+          <a:stretch/>
+        </p:blipFill>
+        <p:spPr>
+          <a:xfrm>
+            <a:off x="312102" y="310348"/>
+            <a:ext cx="10148325" cy="3804451"/>
+          </a:xfrm>
+          <a:prstGeom prst="rect">
+            <a:avLst/>
+          </a:prstGeom>
+        </p:spPr>
+      </p:pic>
+      <p:sp>
+        <p:nvSpPr>
+          <p:cNvPr id="4" name="Текст 3">
+            <a:extLst>
+              <a:ext uri="{FF2B5EF4-FFF2-40B4-BE49-F238E27FC236}">
+                <a16:creationId xmlns:a16="http://schemas.microsoft.com/office/drawing/2014/main" id="{0F4B6125-AED5-176B-E08C-5D747A80A55C}"/>
+              </a:ext>
+            </a:extLst>
+          </p:cNvPr>
+          <p:cNvSpPr>
+            <a:spLocks noGrp="1"/>
+          </p:cNvSpPr>
+          <p:nvPr>
+            <p:ph type="body" sz="half" idx="2"/>
+          </p:nvPr>
+        </p:nvSpPr>
+        <p:spPr>
+          <a:xfrm>
+            <a:off x="677334" y="4703611"/>
+            <a:ext cx="8771466" cy="2154389"/>
+          </a:xfrm>
+        </p:spPr>
+        <p:txBody>
+          <a:bodyPr>
+            <a:noAutofit/>
+          </a:bodyPr>
+          <a:lstStyle/>
+          <a:p>
+            <a:pPr algn="just"/>
+            <a:r>
+              <a:rPr lang="ru-RU" sz="1600" dirty="0"/>
+              <a:t>Файл products.js использовался для хранения информации о товарах веб-сайта. В данном файле были реализованы массивы объектов, содержащие название товара, категорию, стоимость и изображение, что позволило динамически выводить карточки товаров на страницах сайта. В крупных веб-проектах данные о товарах обычно хранятся в базе данных и передаются на сайт через </a:t>
+            </a:r>
+            <a:r>
+              <a:rPr lang="ru-RU" sz="1600" dirty="0" err="1"/>
+              <a:t>backend</a:t>
+            </a:r>
+            <a:r>
+              <a:rPr lang="ru-RU" sz="1600" dirty="0"/>
+              <a:t> и API. В данном проекте использовался упрощённый вариант реализации, при котором информация о товарах была сохранена в отдельном JavaScript файле и динамически выводилась на страницы веб-сайта.</a:t>
+            </a:r>
+          </a:p>
+          <a:p>
+            <a:pPr algn="just"/>
+            <a:endParaRPr lang="ru-RU" sz="1600" dirty="0"/>
+          </a:p>
+          <a:p>
+            <a:pPr algn="just"/>
+            <a:endParaRPr lang="ru-RU" sz="1600" dirty="0"/>
+          </a:p>
+          <a:p>
+            <a:pPr algn="just"/>
+            <a:endParaRPr lang="ru-RU" sz="1600" dirty="0"/>
+          </a:p>
+          <a:p>
+            <a:pPr algn="just"/>
+            <a:endParaRPr lang="ru-RU" sz="1600" dirty="0"/>
+          </a:p>
+        </p:txBody>
+      </p:sp>
+    </p:spTree>
+    <p:extLst>
+      <p:ext uri="{BB962C8B-B14F-4D97-AF65-F5344CB8AC3E}">
+        <p14:creationId xmlns:p14="http://schemas.microsoft.com/office/powerpoint/2010/main" val="3243194610"/>
+      </p:ext>
+    </p:extLst>
+  </p:cSld>
+  <p:clrMapOvr>
+    <a:masterClrMapping/>
+  </p:clrMapOvr>
+</p:sld>
+</file>
+
+<file path=ppt/slides/slide14.xml><?xml version="1.0" encoding="utf-8"?>
+<p:sld xmlns:a="http://schemas.openxmlformats.org/drawingml/2006/main" xmlns:r="http://schemas.openxmlformats.org/officeDocument/2006/relationships" xmlns:p="http://schemas.openxmlformats.org/presentationml/2006/main">
+  <p:cSld>
+    <p:spTree>
+      <p:nvGrpSpPr>
+        <p:cNvPr id="1" name=""/>
+        <p:cNvGrpSpPr/>
+        <p:nvPr/>
+      </p:nvGrpSpPr>
+      <p:grpSpPr>
+        <a:xfrm>
+          <a:off x="0" y="0"/>
+          <a:ext cx="0" cy="0"/>
+          <a:chOff x="0" y="0"/>
+          <a:chExt cx="0" cy="0"/>
+        </a:xfrm>
+      </p:grpSpPr>
+      <p:sp>
+        <p:nvSpPr>
+          <p:cNvPr id="2" name="Заголовок 1">
+            <a:extLst>
+              <a:ext uri="{FF2B5EF4-FFF2-40B4-BE49-F238E27FC236}">
+                <a16:creationId xmlns:a16="http://schemas.microsoft.com/office/drawing/2014/main" id="{C97514C1-71A7-EA90-B342-9FFDD336CD56}"/>
+              </a:ext>
+            </a:extLst>
+          </p:cNvPr>
+          <p:cNvSpPr>
+            <a:spLocks noGrp="1"/>
+          </p:cNvSpPr>
+          <p:nvPr>
+            <p:ph type="title"/>
+          </p:nvPr>
+        </p:nvSpPr>
+        <p:spPr/>
+        <p:txBody>
+          <a:bodyPr>
+            <a:normAutofit/>
+          </a:bodyPr>
+          <a:lstStyle/>
+          <a:p>
+            <a:r>
+              <a:rPr lang="ru-RU" dirty="0"/>
+              <a:t>Адаптивный дизайн</a:t>
+            </a:r>
+          </a:p>
+        </p:txBody>
+      </p:sp>
+      <p:pic>
+        <p:nvPicPr>
+          <p:cNvPr id="6" name="Рисунок 5">
+            <a:extLst>
+              <a:ext uri="{FF2B5EF4-FFF2-40B4-BE49-F238E27FC236}">
+                <a16:creationId xmlns:a16="http://schemas.microsoft.com/office/drawing/2014/main" id="{A3E5D576-B761-80E4-DCD0-421423A1A358}"/>
+              </a:ext>
+            </a:extLst>
+          </p:cNvPr>
+          <p:cNvPicPr>
+            <a:picLocks noGrp="1" noChangeAspect="1"/>
+          </p:cNvPicPr>
+          <p:nvPr>
+            <p:ph type="pic" idx="1"/>
+          </p:nvPr>
+        </p:nvPicPr>
+        <p:blipFill>
+          <a:blip r:embed="rId2"/>
+          <a:srcRect t="-679" r="36046" b="175"/>
+          <a:stretch>
+            <a:fillRect/>
+          </a:stretch>
+        </p:blipFill>
+        <p:spPr>
+          <a:xfrm>
+            <a:off x="569179" y="435595"/>
+            <a:ext cx="2991807" cy="3598607"/>
+          </a:xfrm>
+          <a:prstGeom prst="rect">
+            <a:avLst/>
+          </a:prstGeom>
+        </p:spPr>
+      </p:pic>
+      <p:sp>
+        <p:nvSpPr>
+          <p:cNvPr id="4" name="Текст 3">
+            <a:extLst>
+              <a:ext uri="{FF2B5EF4-FFF2-40B4-BE49-F238E27FC236}">
+                <a16:creationId xmlns:a16="http://schemas.microsoft.com/office/drawing/2014/main" id="{5FDCD977-E8B9-48BC-D6FE-375B5C7547F7}"/>
+              </a:ext>
+            </a:extLst>
+          </p:cNvPr>
+          <p:cNvSpPr>
+            <a:spLocks noGrp="1"/>
+          </p:cNvSpPr>
+          <p:nvPr>
+            <p:ph type="body" sz="half" idx="2"/>
+          </p:nvPr>
+        </p:nvSpPr>
+        <p:spPr>
+          <a:xfrm>
+            <a:off x="677334" y="5260029"/>
+            <a:ext cx="8958279" cy="1348094"/>
+          </a:xfrm>
+        </p:spPr>
+        <p:txBody>
+          <a:bodyPr>
+            <a:normAutofit/>
+          </a:bodyPr>
+          <a:lstStyle/>
+          <a:p>
+            <a:br>
+              <a:rPr lang="ru-RU" sz="1800" dirty="0"/>
+            </a:br>
+            <a:r>
+              <a:rPr lang="ru-RU" sz="1800" dirty="0"/>
+              <a:t>Адаптивный дизайн обеспечивает корректное отображение веб-сайта на различных устройствах. Для этого были использованы </a:t>
+            </a:r>
+            <a:r>
+              <a:rPr lang="ru-RU" sz="1800" dirty="0" err="1"/>
+              <a:t>media</a:t>
+            </a:r>
+            <a:r>
+              <a:rPr lang="ru-RU" sz="1800" dirty="0"/>
+              <a:t> </a:t>
+            </a:r>
+            <a:r>
+              <a:rPr lang="ru-RU" sz="1800" dirty="0" err="1"/>
+              <a:t>queries</a:t>
+            </a:r>
+            <a:r>
+              <a:rPr lang="ru-RU" sz="1800" dirty="0"/>
+              <a:t> и гибкая структура интерфейса. </a:t>
+            </a:r>
+          </a:p>
+          <a:p>
+            <a:endParaRPr lang="ru-RU" sz="1800" dirty="0"/>
+          </a:p>
+        </p:txBody>
+      </p:sp>
+      <p:pic>
+        <p:nvPicPr>
+          <p:cNvPr id="9" name="Рисунок 8">
+            <a:extLst>
+              <a:ext uri="{FF2B5EF4-FFF2-40B4-BE49-F238E27FC236}">
+                <a16:creationId xmlns:a16="http://schemas.microsoft.com/office/drawing/2014/main" id="{45453FB0-935B-9504-0F2E-B4E9C7C757CC}"/>
+              </a:ext>
+            </a:extLst>
+          </p:cNvPr>
+          <p:cNvPicPr>
+            <a:picLocks noChangeAspect="1"/>
+          </p:cNvPicPr>
+          <p:nvPr/>
+        </p:nvPicPr>
+        <p:blipFill>
+          <a:blip r:embed="rId3"/>
+          <a:stretch>
+            <a:fillRect/>
+          </a:stretch>
+        </p:blipFill>
+        <p:spPr>
+          <a:xfrm>
+            <a:off x="4077926" y="435595"/>
+            <a:ext cx="3483079" cy="4870555"/>
+          </a:xfrm>
+          <a:prstGeom prst="rect">
+            <a:avLst/>
+          </a:prstGeom>
+        </p:spPr>
+      </p:pic>
+    </p:spTree>
+    <p:extLst>
+      <p:ext uri="{BB962C8B-B14F-4D97-AF65-F5344CB8AC3E}">
+        <p14:creationId xmlns:p14="http://schemas.microsoft.com/office/powerpoint/2010/main" val="2271364113"/>
+      </p:ext>
+    </p:extLst>
+  </p:cSld>
+  <p:clrMapOvr>
+    <a:masterClrMapping/>
+  </p:clrMapOvr>
+</p:sld>
+</file>
+
+<file path=ppt/slides/slide15.xml><?xml version="1.0" encoding="utf-8"?>
+<p:sld xmlns:a="http://schemas.openxmlformats.org/drawingml/2006/main" xmlns:r="http://schemas.openxmlformats.org/officeDocument/2006/relationships" xmlns:p="http://schemas.openxmlformats.org/presentationml/2006/main">
+  <p:cSld>
+    <p:spTree>
+      <p:nvGrpSpPr>
+        <p:cNvPr id="1" name=""/>
+        <p:cNvGrpSpPr/>
+        <p:nvPr/>
+      </p:nvGrpSpPr>
+      <p:grpSpPr>
+        <a:xfrm>
+          <a:off x="0" y="0"/>
+          <a:ext cx="0" cy="0"/>
+          <a:chOff x="0" y="0"/>
+          <a:chExt cx="0" cy="0"/>
+        </a:xfrm>
+      </p:grpSpPr>
+      <p:sp>
+        <p:nvSpPr>
+          <p:cNvPr id="2" name="Заголовок 1">
+            <a:extLst>
+              <a:ext uri="{FF2B5EF4-FFF2-40B4-BE49-F238E27FC236}">
                 <a16:creationId xmlns:a16="http://schemas.microsoft.com/office/drawing/2014/main" id="{8379737F-09A1-A017-4E80-5D7C0BBFED06}"/>
               </a:ext>
             </a:extLst>
@@ -6300,7 +6601,7 @@
         </p:nvSpPr>
         <p:spPr>
           <a:xfrm>
-            <a:off x="677335" y="788419"/>
+            <a:off x="677335" y="1240703"/>
             <a:ext cx="8596668" cy="751840"/>
           </a:xfrm>
         </p:spPr>
@@ -6336,7 +6637,7 @@
         </p:nvSpPr>
         <p:spPr>
           <a:xfrm>
-            <a:off x="677335" y="4586093"/>
+            <a:off x="677335" y="3465722"/>
             <a:ext cx="8596668" cy="1570962"/>
           </a:xfrm>
         </p:spPr>
@@ -6365,113 +6666,6 @@
             <a:r>
               <a:rPr lang="ru-RU" dirty="0"/>
               <a:t> и минималистичный дизайн. Это позволило сделать интерфейс более удобным и визуально привлекательным.</a:t>
-            </a:r>
-          </a:p>
-        </p:txBody>
-      </p:sp>
-      <p:sp>
-        <p:nvSpPr>
-          <p:cNvPr id="4" name="Заголовок 1">
-            <a:extLst>
-              <a:ext uri="{FF2B5EF4-FFF2-40B4-BE49-F238E27FC236}">
-                <a16:creationId xmlns:a16="http://schemas.microsoft.com/office/drawing/2014/main" id="{A5438D79-DA3C-AF58-2726-22F002615C9C}"/>
-              </a:ext>
-            </a:extLst>
-          </p:cNvPr>
-          <p:cNvSpPr txBox="1">
-            <a:spLocks/>
-          </p:cNvSpPr>
-          <p:nvPr/>
-        </p:nvSpPr>
-        <p:spPr>
-          <a:xfrm>
-            <a:off x="677335" y="2476639"/>
-            <a:ext cx="8596668" cy="733192"/>
-          </a:xfrm>
-          <a:prstGeom prst="rect">
-            <a:avLst/>
-          </a:prstGeom>
-        </p:spPr>
-        <p:txBody>
-          <a:bodyPr vert="horz" lIns="91440" tIns="45720" rIns="91440" bIns="45720" rtlCol="0" anchor="ctr">
-            <a:normAutofit/>
-          </a:bodyPr>
-          <a:lstStyle>
-            <a:lvl1pPr algn="l" defTabSz="457200" rtl="0" eaLnBrk="1" latinLnBrk="0" hangingPunct="1">
-              <a:spcBef>
-                <a:spcPct val="0"/>
-              </a:spcBef>
-              <a:buNone/>
-              <a:defRPr sz="4400" b="0" kern="1200" cap="none">
-                <a:solidFill>
-                  <a:schemeClr val="accent1"/>
-                </a:solidFill>
-                <a:latin typeface="+mj-lt"/>
-                <a:ea typeface="+mj-ea"/>
-                <a:cs typeface="+mj-cs"/>
-              </a:defRPr>
-            </a:lvl1pPr>
-            <a:lvl2pPr eaLnBrk="1" hangingPunct="1">
-              <a:defRPr>
-                <a:solidFill>
-                  <a:schemeClr val="tx2"/>
-                </a:solidFill>
-              </a:defRPr>
-            </a:lvl2pPr>
-            <a:lvl3pPr eaLnBrk="1" hangingPunct="1">
-              <a:defRPr>
-                <a:solidFill>
-                  <a:schemeClr val="tx2"/>
-                </a:solidFill>
-              </a:defRPr>
-            </a:lvl3pPr>
-            <a:lvl4pPr eaLnBrk="1" hangingPunct="1">
-              <a:defRPr>
-                <a:solidFill>
-                  <a:schemeClr val="tx2"/>
-                </a:solidFill>
-              </a:defRPr>
-            </a:lvl4pPr>
-            <a:lvl5pPr eaLnBrk="1" hangingPunct="1">
-              <a:defRPr>
-                <a:solidFill>
-                  <a:schemeClr val="tx2"/>
-                </a:solidFill>
-              </a:defRPr>
-            </a:lvl5pPr>
-            <a:lvl6pPr eaLnBrk="1" hangingPunct="1">
-              <a:defRPr>
-                <a:solidFill>
-                  <a:schemeClr val="tx2"/>
-                </a:solidFill>
-              </a:defRPr>
-            </a:lvl6pPr>
-            <a:lvl7pPr eaLnBrk="1" hangingPunct="1">
-              <a:defRPr>
-                <a:solidFill>
-                  <a:schemeClr val="tx2"/>
-                </a:solidFill>
-              </a:defRPr>
-            </a:lvl7pPr>
-            <a:lvl8pPr eaLnBrk="1" hangingPunct="1">
-              <a:defRPr>
-                <a:solidFill>
-                  <a:schemeClr val="tx2"/>
-                </a:solidFill>
-              </a:defRPr>
-            </a:lvl8pPr>
-            <a:lvl9pPr eaLnBrk="1" hangingPunct="1">
-              <a:defRPr>
-                <a:solidFill>
-                  <a:schemeClr val="tx2"/>
-                </a:solidFill>
-              </a:defRPr>
-            </a:lvl9pPr>
-          </a:lstStyle>
-          <a:p>
-            <a:r>
-              <a:rPr lang="ru-RU" sz="3600" dirty="0"/>
-              <a:t>Адаптивный дизайн</a:t>
             </a:r>
           </a:p>
         </p:txBody>
@@ -6492,7 +6686,7 @@
         </p:nvSpPr>
         <p:spPr>
           <a:xfrm>
-            <a:off x="677335" y="4430349"/>
+            <a:off x="677335" y="3194810"/>
             <a:ext cx="8596668" cy="541824"/>
           </a:xfrm>
           <a:prstGeom prst="rect">
@@ -6603,7 +6797,7 @@
         </p:nvSpPr>
         <p:spPr>
           <a:xfrm>
-            <a:off x="677335" y="1164339"/>
+            <a:off x="677335" y="1858038"/>
             <a:ext cx="8596668" cy="1570962"/>
           </a:xfrm>
           <a:prstGeom prst="rect">
@@ -6835,290 +7029,17 @@
           </a:lstStyle>
           <a:p>
             <a:r>
-              <a:rPr lang="ru-RU" dirty="0" err="1"/>
+              <a:rPr lang="ru-RU" sz="2000" dirty="0" err="1"/>
               <a:t>localStorage</a:t>
             </a:r>
             <a:r>
-              <a:rPr lang="ru-RU" dirty="0"/>
+              <a:rPr lang="ru-RU" sz="2000" dirty="0"/>
               <a:t> использовался для сохранения данных корзины в браузере пользователя. Благодаря этому информация сохраняется даже после обновления страницы. Адаптивный дизайн</a:t>
             </a:r>
             <a:br>
-              <a:rPr lang="ru-RU" dirty="0"/>
+              <a:rPr lang="ru-RU" sz="2000" dirty="0"/>
             </a:br>
-            <a:endParaRPr lang="ru-RU" dirty="0"/>
-          </a:p>
-        </p:txBody>
-      </p:sp>
-      <p:sp>
-        <p:nvSpPr>
-          <p:cNvPr id="7" name="Текст 2">
-            <a:extLst>
-              <a:ext uri="{FF2B5EF4-FFF2-40B4-BE49-F238E27FC236}">
-                <a16:creationId xmlns:a16="http://schemas.microsoft.com/office/drawing/2014/main" id="{5C7BA9CC-918D-13B2-27AB-90D327407E9B}"/>
-              </a:ext>
-            </a:extLst>
-          </p:cNvPr>
-          <p:cNvSpPr txBox="1">
-            <a:spLocks/>
-          </p:cNvSpPr>
-          <p:nvPr/>
-        </p:nvSpPr>
-        <p:spPr>
-          <a:xfrm>
-            <a:off x="677335" y="2643519"/>
-            <a:ext cx="8596668" cy="1570962"/>
-          </a:xfrm>
-          <a:prstGeom prst="rect">
-            <a:avLst/>
-          </a:prstGeom>
-        </p:spPr>
-        <p:txBody>
-          <a:bodyPr vert="horz" lIns="91440" tIns="45720" rIns="91440" bIns="45720" rtlCol="0" anchor="ctr">
-            <a:normAutofit/>
-          </a:bodyPr>
-          <a:lstStyle>
-            <a:lvl1pPr marL="0" indent="0" algn="l" defTabSz="457200" rtl="0" eaLnBrk="1" latinLnBrk="0" hangingPunct="1">
-              <a:spcBef>
-                <a:spcPts val="1000"/>
-              </a:spcBef>
-              <a:spcAft>
-                <a:spcPts val="0"/>
-              </a:spcAft>
-              <a:buClr>
-                <a:schemeClr val="accent1"/>
-              </a:buClr>
-              <a:buSzPct val="80000"/>
-              <a:buFont typeface="Wingdings 3" charset="2"/>
-              <a:buNone/>
-              <a:defRPr sz="1800" kern="1200">
-                <a:solidFill>
-                  <a:schemeClr val="tx1">
-                    <a:lumMod val="75000"/>
-                    <a:lumOff val="25000"/>
-                  </a:schemeClr>
-                </a:solidFill>
-                <a:latin typeface="+mn-lt"/>
-                <a:ea typeface="+mn-ea"/>
-                <a:cs typeface="+mn-cs"/>
-              </a:defRPr>
-            </a:lvl1pPr>
-            <a:lvl2pPr marL="457200" indent="0" algn="l" defTabSz="457200" rtl="0" eaLnBrk="1" latinLnBrk="0" hangingPunct="1">
-              <a:spcBef>
-                <a:spcPts val="1000"/>
-              </a:spcBef>
-              <a:spcAft>
-                <a:spcPts val="0"/>
-              </a:spcAft>
-              <a:buClr>
-                <a:schemeClr val="accent1"/>
-              </a:buClr>
-              <a:buSzPct val="80000"/>
-              <a:buFont typeface="Wingdings 3" charset="2"/>
-              <a:buNone/>
-              <a:defRPr sz="1800" kern="1200">
-                <a:solidFill>
-                  <a:schemeClr val="tx1">
-                    <a:tint val="75000"/>
-                  </a:schemeClr>
-                </a:solidFill>
-                <a:latin typeface="+mn-lt"/>
-                <a:ea typeface="+mn-ea"/>
-                <a:cs typeface="+mn-cs"/>
-              </a:defRPr>
-            </a:lvl2pPr>
-            <a:lvl3pPr marL="914400" indent="0" algn="l" defTabSz="457200" rtl="0" eaLnBrk="1" latinLnBrk="0" hangingPunct="1">
-              <a:spcBef>
-                <a:spcPts val="1000"/>
-              </a:spcBef>
-              <a:spcAft>
-                <a:spcPts val="0"/>
-              </a:spcAft>
-              <a:buClr>
-                <a:schemeClr val="accent1"/>
-              </a:buClr>
-              <a:buSzPct val="80000"/>
-              <a:buFont typeface="Wingdings 3" charset="2"/>
-              <a:buNone/>
-              <a:defRPr sz="1600" kern="1200">
-                <a:solidFill>
-                  <a:schemeClr val="tx1">
-                    <a:tint val="75000"/>
-                  </a:schemeClr>
-                </a:solidFill>
-                <a:latin typeface="+mn-lt"/>
-                <a:ea typeface="+mn-ea"/>
-                <a:cs typeface="+mn-cs"/>
-              </a:defRPr>
-            </a:lvl3pPr>
-            <a:lvl4pPr marL="1371600" indent="0" algn="l" defTabSz="457200" rtl="0" eaLnBrk="1" latinLnBrk="0" hangingPunct="1">
-              <a:spcBef>
-                <a:spcPts val="1000"/>
-              </a:spcBef>
-              <a:spcAft>
-                <a:spcPts val="0"/>
-              </a:spcAft>
-              <a:buClr>
-                <a:schemeClr val="accent1"/>
-              </a:buClr>
-              <a:buSzPct val="80000"/>
-              <a:buFont typeface="Wingdings 3" charset="2"/>
-              <a:buNone/>
-              <a:defRPr sz="1400" kern="1200">
-                <a:solidFill>
-                  <a:schemeClr val="tx1">
-                    <a:tint val="75000"/>
-                  </a:schemeClr>
-                </a:solidFill>
-                <a:latin typeface="+mn-lt"/>
-                <a:ea typeface="+mn-ea"/>
-                <a:cs typeface="+mn-cs"/>
-              </a:defRPr>
-            </a:lvl4pPr>
-            <a:lvl5pPr marL="1828800" indent="0" algn="l" defTabSz="457200" rtl="0" eaLnBrk="1" latinLnBrk="0" hangingPunct="1">
-              <a:spcBef>
-                <a:spcPts val="1000"/>
-              </a:spcBef>
-              <a:spcAft>
-                <a:spcPts val="0"/>
-              </a:spcAft>
-              <a:buClr>
-                <a:schemeClr val="accent1"/>
-              </a:buClr>
-              <a:buSzPct val="80000"/>
-              <a:buFont typeface="Wingdings 3" charset="2"/>
-              <a:buNone/>
-              <a:defRPr sz="1400" kern="1200">
-                <a:solidFill>
-                  <a:schemeClr val="tx1">
-                    <a:tint val="75000"/>
-                  </a:schemeClr>
-                </a:solidFill>
-                <a:latin typeface="+mn-lt"/>
-                <a:ea typeface="+mn-ea"/>
-                <a:cs typeface="+mn-cs"/>
-              </a:defRPr>
-            </a:lvl5pPr>
-            <a:lvl6pPr marL="2286000" indent="0" algn="l" defTabSz="457200" rtl="0" eaLnBrk="1" latinLnBrk="0" hangingPunct="1">
-              <a:spcBef>
-                <a:spcPts val="1000"/>
-              </a:spcBef>
-              <a:spcAft>
-                <a:spcPts val="0"/>
-              </a:spcAft>
-              <a:buClr>
-                <a:schemeClr val="accent1"/>
-              </a:buClr>
-              <a:buSzPct val="80000"/>
-              <a:buFont typeface="Wingdings 3" charset="2"/>
-              <a:buNone/>
-              <a:defRPr sz="1400" kern="1200">
-                <a:solidFill>
-                  <a:schemeClr val="tx1">
-                    <a:tint val="75000"/>
-                  </a:schemeClr>
-                </a:solidFill>
-                <a:latin typeface="+mn-lt"/>
-                <a:ea typeface="+mn-ea"/>
-                <a:cs typeface="+mn-cs"/>
-              </a:defRPr>
-            </a:lvl6pPr>
-            <a:lvl7pPr marL="2743200" indent="0" algn="l" defTabSz="457200" rtl="0" eaLnBrk="1" latinLnBrk="0" hangingPunct="1">
-              <a:spcBef>
-                <a:spcPts val="1000"/>
-              </a:spcBef>
-              <a:spcAft>
-                <a:spcPts val="0"/>
-              </a:spcAft>
-              <a:buClr>
-                <a:schemeClr val="accent1"/>
-              </a:buClr>
-              <a:buSzPct val="80000"/>
-              <a:buFont typeface="Wingdings 3" charset="2"/>
-              <a:buNone/>
-              <a:defRPr sz="1400" kern="1200">
-                <a:solidFill>
-                  <a:schemeClr val="tx1">
-                    <a:tint val="75000"/>
-                  </a:schemeClr>
-                </a:solidFill>
-                <a:latin typeface="+mn-lt"/>
-                <a:ea typeface="+mn-ea"/>
-                <a:cs typeface="+mn-cs"/>
-              </a:defRPr>
-            </a:lvl7pPr>
-            <a:lvl8pPr marL="3200400" indent="0" algn="l" defTabSz="457200" rtl="0" eaLnBrk="1" latinLnBrk="0" hangingPunct="1">
-              <a:spcBef>
-                <a:spcPts val="1000"/>
-              </a:spcBef>
-              <a:spcAft>
-                <a:spcPts val="0"/>
-              </a:spcAft>
-              <a:buClr>
-                <a:schemeClr val="accent1"/>
-              </a:buClr>
-              <a:buSzPct val="80000"/>
-              <a:buFont typeface="Wingdings 3" charset="2"/>
-              <a:buNone/>
-              <a:defRPr sz="1400" kern="1200">
-                <a:solidFill>
-                  <a:schemeClr val="tx1">
-                    <a:tint val="75000"/>
-                  </a:schemeClr>
-                </a:solidFill>
-                <a:latin typeface="+mn-lt"/>
-                <a:ea typeface="+mn-ea"/>
-                <a:cs typeface="+mn-cs"/>
-              </a:defRPr>
-            </a:lvl8pPr>
-            <a:lvl9pPr marL="3657600" indent="0" algn="l" defTabSz="457200" rtl="0" eaLnBrk="1" latinLnBrk="0" hangingPunct="1">
-              <a:spcBef>
-                <a:spcPts val="1000"/>
-              </a:spcBef>
-              <a:spcAft>
-                <a:spcPts val="0"/>
-              </a:spcAft>
-              <a:buClr>
-                <a:schemeClr val="accent1"/>
-              </a:buClr>
-              <a:buSzPct val="80000"/>
-              <a:buFont typeface="Wingdings 3" charset="2"/>
-              <a:buNone/>
-              <a:defRPr sz="1400" kern="1200">
-                <a:solidFill>
-                  <a:schemeClr val="tx1">
-                    <a:tint val="75000"/>
-                  </a:schemeClr>
-                </a:solidFill>
-                <a:latin typeface="+mn-lt"/>
-                <a:ea typeface="+mn-ea"/>
-                <a:cs typeface="+mn-cs"/>
-              </a:defRPr>
-            </a:lvl9pPr>
-          </a:lstStyle>
-          <a:p>
-            <a:br>
-              <a:rPr lang="ru-RU" dirty="0"/>
-            </a:br>
-            <a:r>
-              <a:rPr lang="ru-RU" dirty="0"/>
-              <a:t>Адаптивный дизайн обеспечивает корректное отображение веб-сайта на различных устройствах. Для этого были использованы </a:t>
-            </a:r>
-            <a:r>
-              <a:rPr lang="ru-RU" dirty="0" err="1"/>
-              <a:t>media</a:t>
-            </a:r>
-            <a:r>
-              <a:rPr lang="ru-RU" dirty="0"/>
-              <a:t> </a:t>
-            </a:r>
-            <a:r>
-              <a:rPr lang="ru-RU" dirty="0" err="1"/>
-              <a:t>queries</a:t>
-            </a:r>
-            <a:r>
-              <a:rPr lang="ru-RU" dirty="0"/>
-              <a:t> и гибкая структура интерфейса. </a:t>
-            </a:r>
+            <a:endParaRPr lang="ru-RU" sz="2000" dirty="0"/>
           </a:p>
         </p:txBody>
       </p:sp>
@@ -7135,7 +7056,7 @@
 </p:sld>
 </file>
 
-<file path=ppt/slides/slide14.xml><?xml version="1.0" encoding="utf-8"?>
+<file path=ppt/slides/slide16.xml><?xml version="1.0" encoding="utf-8"?>
 <p:sld xmlns:a="http://schemas.openxmlformats.org/drawingml/2006/main" xmlns:r="http://schemas.openxmlformats.org/officeDocument/2006/relationships" xmlns:p="http://schemas.openxmlformats.org/presentationml/2006/main">
   <p:cSld>
     <p:spTree>
@@ -7976,7 +7897,7 @@
 </p:sld>
 </file>
 
-<file path=ppt/slides/slide15.xml><?xml version="1.0" encoding="utf-8"?>
+<file path=ppt/slides/slide17.xml><?xml version="1.0" encoding="utf-8"?>
 <p:sld xmlns:a="http://schemas.openxmlformats.org/drawingml/2006/main" xmlns:r="http://schemas.openxmlformats.org/officeDocument/2006/relationships" xmlns:p="http://schemas.openxmlformats.org/presentationml/2006/main">
   <p:cSld>
     <p:spTree>
@@ -8514,6 +8435,130 @@
           <p:cNvPr id="2" name="Заголовок 1">
             <a:extLst>
               <a:ext uri="{FF2B5EF4-FFF2-40B4-BE49-F238E27FC236}">
+                <a16:creationId xmlns:a16="http://schemas.microsoft.com/office/drawing/2014/main" id="{71387B00-6F63-BE9C-85EF-9208548827C2}"/>
+              </a:ext>
+            </a:extLst>
+          </p:cNvPr>
+          <p:cNvSpPr>
+            <a:spLocks noGrp="1"/>
+          </p:cNvSpPr>
+          <p:nvPr>
+            <p:ph type="title"/>
+          </p:nvPr>
+        </p:nvSpPr>
+        <p:spPr/>
+        <p:txBody>
+          <a:bodyPr/>
+          <a:lstStyle/>
+          <a:p>
+            <a:r>
+              <a:rPr lang="ru-RU" dirty="0"/>
+              <a:t>Загрузочный экран</a:t>
+            </a:r>
+          </a:p>
+        </p:txBody>
+      </p:sp>
+      <p:pic>
+        <p:nvPicPr>
+          <p:cNvPr id="6" name="Рисунок 5">
+            <a:extLst>
+              <a:ext uri="{FF2B5EF4-FFF2-40B4-BE49-F238E27FC236}">
+                <a16:creationId xmlns:a16="http://schemas.microsoft.com/office/drawing/2014/main" id="{7931D7F1-18D8-AE7F-DDCE-18565A7D7E03}"/>
+              </a:ext>
+            </a:extLst>
+          </p:cNvPr>
+          <p:cNvPicPr>
+            <a:picLocks noGrp="1" noChangeAspect="1"/>
+          </p:cNvPicPr>
+          <p:nvPr>
+            <p:ph type="pic" idx="1"/>
+          </p:nvPr>
+        </p:nvPicPr>
+        <p:blipFill>
+          <a:blip r:embed="rId2"/>
+          <a:srcRect t="10242" b="10242"/>
+          <a:stretch/>
+        </p:blipFill>
+        <p:spPr>
+          <a:prstGeom prst="rect">
+            <a:avLst/>
+          </a:prstGeom>
+        </p:spPr>
+      </p:pic>
+      <p:sp>
+        <p:nvSpPr>
+          <p:cNvPr id="4" name="Текст 3">
+            <a:extLst>
+              <a:ext uri="{FF2B5EF4-FFF2-40B4-BE49-F238E27FC236}">
+                <a16:creationId xmlns:a16="http://schemas.microsoft.com/office/drawing/2014/main" id="{F6EBDD3B-1C35-2206-6361-891C26C90860}"/>
+              </a:ext>
+            </a:extLst>
+          </p:cNvPr>
+          <p:cNvSpPr>
+            <a:spLocks noGrp="1"/>
+          </p:cNvSpPr>
+          <p:nvPr>
+            <p:ph type="body" sz="half" idx="2"/>
+          </p:nvPr>
+        </p:nvSpPr>
+        <p:spPr/>
+        <p:txBody>
+          <a:bodyPr/>
+          <a:lstStyle/>
+          <a:p>
+            <a:r>
+              <a:rPr lang="ru-RU" dirty="0"/>
+              <a:t>При запуске веб-сайта отображается загрузочный экран с анимацией логотипа проекта. </a:t>
+            </a:r>
+            <a:r>
+              <a:rPr lang="ru-RU" dirty="0" err="1"/>
+              <a:t>Loader</a:t>
+            </a:r>
+            <a:r>
+              <a:rPr lang="ru-RU" dirty="0"/>
+              <a:t> используется для улучшения визуального восприятия интерфейса и создания более современного пользовательского опыта во время загрузки страницы.</a:t>
+            </a:r>
+          </a:p>
+          <a:p>
+            <a:endParaRPr lang="ru-RU" dirty="0"/>
+          </a:p>
+        </p:txBody>
+      </p:sp>
+    </p:spTree>
+    <p:extLst>
+      <p:ext uri="{BB962C8B-B14F-4D97-AF65-F5344CB8AC3E}">
+        <p14:creationId xmlns:p14="http://schemas.microsoft.com/office/powerpoint/2010/main" val="2511108290"/>
+      </p:ext>
+    </p:extLst>
+  </p:cSld>
+  <p:clrMapOvr>
+    <a:masterClrMapping/>
+  </p:clrMapOvr>
+</p:sld>
+</file>
+
+<file path=ppt/slides/slide7.xml><?xml version="1.0" encoding="utf-8"?>
+<p:sld xmlns:a="http://schemas.openxmlformats.org/drawingml/2006/main" xmlns:r="http://schemas.openxmlformats.org/officeDocument/2006/relationships" xmlns:p="http://schemas.openxmlformats.org/presentationml/2006/main">
+  <p:cSld>
+    <p:spTree>
+      <p:nvGrpSpPr>
+        <p:cNvPr id="1" name=""/>
+        <p:cNvGrpSpPr/>
+        <p:nvPr/>
+      </p:nvGrpSpPr>
+      <p:grpSpPr>
+        <a:xfrm>
+          <a:off x="0" y="0"/>
+          <a:ext cx="0" cy="0"/>
+          <a:chOff x="0" y="0"/>
+          <a:chExt cx="0" cy="0"/>
+        </a:xfrm>
+      </p:grpSpPr>
+      <p:sp>
+        <p:nvSpPr>
+          <p:cNvPr id="2" name="Заголовок 1">
+            <a:extLst>
+              <a:ext uri="{FF2B5EF4-FFF2-40B4-BE49-F238E27FC236}">
                 <a16:creationId xmlns:a16="http://schemas.microsoft.com/office/drawing/2014/main" id="{4999C0D2-9EA7-120F-10C6-29B517AF9D28}"/>
               </a:ext>
             </a:extLst>
@@ -8641,7 +8686,7 @@
 </p:sld>
 </file>
 
-<file path=ppt/slides/slide7.xml><?xml version="1.0" encoding="utf-8"?>
+<file path=ppt/slides/slide8.xml><?xml version="1.0" encoding="utf-8"?>
 <p:sld xmlns:a="http://schemas.openxmlformats.org/drawingml/2006/main" xmlns:r="http://schemas.openxmlformats.org/officeDocument/2006/relationships" xmlns:p="http://schemas.openxmlformats.org/presentationml/2006/main">
   <p:cSld>
     <p:spTree>
@@ -8900,7 +8945,7 @@
 </p:sld>
 </file>
 
-<file path=ppt/slides/slide8.xml><?xml version="1.0" encoding="utf-8"?>
+<file path=ppt/slides/slide9.xml><?xml version="1.0" encoding="utf-8"?>
 <p:sld xmlns:a="http://schemas.openxmlformats.org/drawingml/2006/main" xmlns:r="http://schemas.openxmlformats.org/officeDocument/2006/relationships" xmlns:p="http://schemas.openxmlformats.org/presentationml/2006/main">
   <p:cSld>
     <p:spTree>
@@ -9010,125 +9055,6 @@
     <p:extLst>
       <p:ext uri="{BB962C8B-B14F-4D97-AF65-F5344CB8AC3E}">
         <p14:creationId xmlns:p14="http://schemas.microsoft.com/office/powerpoint/2010/main" val="4284688916"/>
-      </p:ext>
-    </p:extLst>
-  </p:cSld>
-  <p:clrMapOvr>
-    <a:masterClrMapping/>
-  </p:clrMapOvr>
-</p:sld>
-</file>
-
-<file path=ppt/slides/slide9.xml><?xml version="1.0" encoding="utf-8"?>
-<p:sld xmlns:a="http://schemas.openxmlformats.org/drawingml/2006/main" xmlns:r="http://schemas.openxmlformats.org/officeDocument/2006/relationships" xmlns:p="http://schemas.openxmlformats.org/presentationml/2006/main">
-  <p:cSld>
-    <p:spTree>
-      <p:nvGrpSpPr>
-        <p:cNvPr id="1" name=""/>
-        <p:cNvGrpSpPr/>
-        <p:nvPr/>
-      </p:nvGrpSpPr>
-      <p:grpSpPr>
-        <a:xfrm>
-          <a:off x="0" y="0"/>
-          <a:ext cx="0" cy="0"/>
-          <a:chOff x="0" y="0"/>
-          <a:chExt cx="0" cy="0"/>
-        </a:xfrm>
-      </p:grpSpPr>
-      <p:sp>
-        <p:nvSpPr>
-          <p:cNvPr id="2" name="Заголовок 1">
-            <a:extLst>
-              <a:ext uri="{FF2B5EF4-FFF2-40B4-BE49-F238E27FC236}">
-                <a16:creationId xmlns:a16="http://schemas.microsoft.com/office/drawing/2014/main" id="{35D28735-BA83-B195-15F7-63FF314EB393}"/>
-              </a:ext>
-            </a:extLst>
-          </p:cNvPr>
-          <p:cNvSpPr>
-            <a:spLocks noGrp="1"/>
-          </p:cNvSpPr>
-          <p:nvPr>
-            <p:ph type="title"/>
-          </p:nvPr>
-        </p:nvSpPr>
-        <p:spPr/>
-        <p:txBody>
-          <a:bodyPr/>
-          <a:lstStyle/>
-          <a:p>
-            <a:r>
-              <a:rPr lang="ru-RU" dirty="0"/>
-              <a:t>Карточки товаров</a:t>
-            </a:r>
-          </a:p>
-        </p:txBody>
-      </p:sp>
-      <p:pic>
-        <p:nvPicPr>
-          <p:cNvPr id="6" name="Рисунок 5">
-            <a:extLst>
-              <a:ext uri="{FF2B5EF4-FFF2-40B4-BE49-F238E27FC236}">
-                <a16:creationId xmlns:a16="http://schemas.microsoft.com/office/drawing/2014/main" id="{C9FA32EB-1D5E-2B7B-7C3C-2F97D0EE0988}"/>
-              </a:ext>
-            </a:extLst>
-          </p:cNvPr>
-          <p:cNvPicPr>
-            <a:picLocks noGrp="1" noChangeAspect="1"/>
-          </p:cNvPicPr>
-          <p:nvPr>
-            <p:ph type="pic" idx="1"/>
-          </p:nvPr>
-        </p:nvPicPr>
-        <p:blipFill>
-          <a:blip r:embed="rId2"/>
-          <a:srcRect l="-567" r="7"/>
-          <a:stretch>
-            <a:fillRect/>
-          </a:stretch>
-        </p:blipFill>
-        <p:spPr>
-          <a:xfrm>
-            <a:off x="677334" y="1487303"/>
-            <a:ext cx="8596667" cy="3103455"/>
-          </a:xfrm>
-          <a:prstGeom prst="rect">
-            <a:avLst/>
-          </a:prstGeom>
-        </p:spPr>
-      </p:pic>
-      <p:sp>
-        <p:nvSpPr>
-          <p:cNvPr id="4" name="Текст 3">
-            <a:extLst>
-              <a:ext uri="{FF2B5EF4-FFF2-40B4-BE49-F238E27FC236}">
-                <a16:creationId xmlns:a16="http://schemas.microsoft.com/office/drawing/2014/main" id="{1CE68BCA-23DE-7DC4-44FA-48CF5E210441}"/>
-              </a:ext>
-            </a:extLst>
-          </p:cNvPr>
-          <p:cNvSpPr>
-            <a:spLocks noGrp="1"/>
-          </p:cNvSpPr>
-          <p:nvPr>
-            <p:ph type="body" sz="half" idx="2"/>
-          </p:nvPr>
-        </p:nvSpPr>
-        <p:spPr/>
-        <p:txBody>
-          <a:bodyPr/>
-          <a:lstStyle/>
-          <a:p>
-            <a:r>
-              <a:rPr lang="ru-RU" dirty="0"/>
-              <a:t>Карточки товаров содержат основную информацию о продукте, включая изображение, название и стоимость. Также в карточках реализована кнопка добавления товара в корзину.</a:t>
-            </a:r>
-          </a:p>
-        </p:txBody>
-      </p:sp>
-    </p:spTree>
-    <p:extLst>
-      <p:ext uri="{BB962C8B-B14F-4D97-AF65-F5344CB8AC3E}">
-        <p14:creationId xmlns:p14="http://schemas.microsoft.com/office/powerpoint/2010/main" val="1714431669"/>
       </p:ext>
     </p:extLst>
   </p:cSld>
